--- a/AdaptLearn-6min.pptx
+++ b/AdaptLearn-6min.pptx
@@ -602,7 +602,9 @@
           <a:p>
             <a:r>
               <a:rPr lang="en-US" dirty="0"/>
-              <a:t>我把好幾門課分別丟進去，系統自己在課與課之間拉出了連結。
+              <a:t>【橋接，語氣要像講一件意外的事】我原本只是想解決一門課的問題。
+結果當我把第二門、第三門課也放進去之後 ——
+系統自己在課與課之間拉出了連結。
 它發現手寫講義裡的「單範正交集」，跟另一門課的「正交集合」講的是同一件事，
 相似度 87%，標成等價概念。
 這些線沒有人教過它，是它從語意上自己找出來的。
@@ -694,7 +696,9 @@
           <a:p>
             <a:r>
               <a:rPr lang="en-US" dirty="0"/>
-              <a:t>剛剛丟進去的是手寫講義，辨識是在我自己的電腦上跑的：離線、不用付費、不外傳。
+              <a:t>【橋接】最後，我知道你們可能會懷疑：這是不是 AI 隨便生成出來的？
+所以我把 AI 的失敗也設計進去了。
+剛剛丟進去的是手寫講義，辨識是在我自己的電腦上跑的：離線、不用付費、不外傳。
 AI 會失敗，所以我把失敗也設計進去：四層 OCR 備援鏈、防幻覺三道防線、
 還有一條誠實原則 —— OCR 失敗會明確告警，絕不靜默套模板假裝成功。
 這是我修過的真實 bug，教訓寫進了設計原則。</a:t>
@@ -1151,7 +1155,9 @@
               <a:t>這是我的網站。丟一份線性代數講義進去，它自己讀完，
 建出來的不是心智圖，是一棵技能樹。
 左邊基礎、右邊進階，箭頭永遠是先修 → 進階。
-每個概念三種狀態：綠色已掌握、發光代表現在可以學了、上鎖代表先修還沒完成。</a:t>
+每個概念三種狀態：綠色已掌握、發光代表現在可以學了、上鎖代表先修還沒完成。
+所以我不用想今天要念哪裡，它會告訴我今天可以念哪裡。
+【橋接，一定要講】但我很快又發現一個問題 ——</a:t>
             </a:r>
             <a:endParaRPr lang="en-US" dirty="0"/>
           </a:p>
@@ -1239,7 +1245,10 @@
           <a:p>
             <a:r>
               <a:rPr lang="en-US" dirty="0"/>
-              <a:t>這個「正交基底」，我掌握度只有 67%，卡住了。我點下去 ——
+              <a:t>【接上一頁】知道今天可以念哪裡，還是不夠。
+因為當我真的卡住的時候，我還是不知道自己到底卡在哪。
+所以我做了第二件事 —— 卡關歸因。
+這個「正交基底」，我掌握度只有 67%，卡住了。我點下去 ——
 它往回追了三層：正交基底 ← 正交集合 ← 正交向量 ← 內積。
 然後直接跟我講：最可能的根因是「內積」，你還沒測驗過，先回去補它。
 我卡在正交基底，但真正的問題在最前面的內積。
@@ -1332,7 +1341,9 @@
           <a:p>
             <a:r>
               <a:rPr lang="en-US" dirty="0"/>
-              <a:t>學習最好的方法是去教別人 —— 因為你會被問倒，
+              <a:t>【橋接】但它說我卡在內積，我怎麼知道它說得對不對？
+如果我要確認自己到底會不會，光靠系統猜還是不夠 —— 我需要讓它考我。
+學習最好的方法是去教別人 —— 因為你會被問倒，
 那個答不出來的瞬間，就是你發現自己漏洞的瞬間。
 我在 NotebookLM 也會叫它出題考我，但每次都要自己打字，麻煩到我後來就懶了。
 所以在我的網站，這件事是內建的：系統挑我最弱的概念出題，不是隨機。
@@ -1424,7 +1435,8 @@
           <a:p>
             <a:r>
               <a:rPr lang="en-US" dirty="0"/>
-              <a:t>答完之後，它用 FSRS-5 這套間隔重複演算法，
+              <a:t>【橋接】但考完也還沒結束 —— 因為今天會，不代表三天後還會。
+答完之後，它用 FSRS-5 這套間隔重複演算法，
 根據作答歷史推估每個概念的記憶狀態，算出遺忘曲線，
 告訴我哪一天該回來複習。錯的東西不會消失，它會排隊等我回來。
 （如果被問「為什麼是 FSRS-5」：因為我需要一個可以估「此刻回憶機率」的模型，
@@ -1516,7 +1528,8 @@
           <a:p>
             <a:r>
               <a:rPr lang="en-US" dirty="0"/>
-              <a:t>這不是實驗數據，是我自己。上學期班排 22，本學期第 10。
+              <a:t>【橋接】所以這套東西，真的改變我的學習了嗎？
+這不是實驗數據，是我自己。上學期班排 22，本學期第 10。（講完停一秒）
 做法是：先用診斷測驗找弱點，再照今晚該讀什麼與遺忘曲線複習。
 誠實講：成績進步受多重因素影響，不能全歸因於單一工具。
 但它把「不知道自己哪裡不會」變成「明確的弱點清單與複習時點」，
@@ -2178,7 +2191,7 @@
                 <a:ea typeface="Microsoft JhengHei" pitchFamily="34" charset="-122"/>
                 <a:cs typeface="Microsoft JhengHei" pitchFamily="34" charset="-120"/>
               </a:rPr>
-              <a:t>一個我自己也沒預期的結果</a:t>
+              <a:t>然後它做到一件我沒預期的事</a:t>
             </a:r>
             <a:endParaRPr lang="en-US" sz="1300" dirty="0"/>
           </a:p>
@@ -2217,7 +2230,7 @@
                 <a:ea typeface="Microsoft JhengHei" pitchFamily="34" charset="-122"/>
                 <a:cs typeface="Microsoft JhengHei" pitchFamily="34" charset="-120"/>
               </a:rPr>
-              <a:t>把好幾門課丟進去，它自己在課與課之間拉出了連結</a:t>
+              <a:t>我原本只想解決一門課 —— 結果它把課與課連起來了</a:t>
             </a:r>
             <a:endParaRPr lang="en-US" sz="3400" dirty="0"/>
           </a:p>
@@ -2662,7 +2675,7 @@
                 <a:ea typeface="Microsoft JhengHei" pitchFamily="34" charset="-122"/>
                 <a:cs typeface="Microsoft JhengHei" pitchFamily="34" charset="-120"/>
               </a:rPr>
-              <a:t>它為什麼撐得住</a:t>
+              <a:t>你可能會懷疑：這是不是 AI 隨便生成的？</a:t>
             </a:r>
             <a:endParaRPr lang="en-US" sz="1300" dirty="0"/>
           </a:p>
@@ -3160,23 +3173,23 @@
         <p:spPr>
           <a:xfrm>
             <a:off x="685800" y="4069080"/>
-            <a:ext cx="2468880" cy="640080"/>
-          </a:xfrm>
-          <a:prstGeom prst="rect">
-            <a:avLst/>
-          </a:prstGeom>
-          <a:noFill/>
-          <a:ln/>
-        </p:spPr>
-        <p:txBody>
-          <a:bodyPr wrap="square" lIns="0" tIns="0" rIns="0" bIns="0" rtlCol="0" anchor="ctr"/>
-          <a:lstStyle/>
-          <a:p>
-            <a:pPr indent="0" marL="0">
-              <a:buNone/>
-            </a:pPr>
-            <a:r>
-              <a:rPr lang="en-US" sz="3200" b="1" dirty="0">
+            <a:ext cx="3364992" cy="640080"/>
+          </a:xfrm>
+          <a:prstGeom prst="rect">
+            <a:avLst/>
+          </a:prstGeom>
+          <a:noFill/>
+          <a:ln/>
+        </p:spPr>
+        <p:txBody>
+          <a:bodyPr wrap="square" lIns="0" tIns="0" rIns="0" bIns="0" rtlCol="0" anchor="ctr"/>
+          <a:lstStyle/>
+          <a:p>
+            <a:pPr indent="0" marL="0">
+              <a:buNone/>
+            </a:pPr>
+            <a:r>
+              <a:rPr lang="en-US" sz="3400" b="1" dirty="0">
                 <a:solidFill>
                   <a:srgbClr val="2F6B3E"/>
                 </a:solidFill>
@@ -3186,7 +3199,7 @@
               </a:rPr>
               <a:t>28 頁</a:t>
             </a:r>
-            <a:endParaRPr lang="en-US" sz="3200" dirty="0"/>
+            <a:endParaRPr lang="en-US" sz="3400" dirty="0"/>
           </a:p>
         </p:txBody>
       </p:sp>
@@ -3198,24 +3211,24 @@
         </p:nvSpPr>
         <p:spPr>
           <a:xfrm>
-            <a:off x="685800" y="4681728"/>
-            <a:ext cx="2468880" cy="320040"/>
-          </a:xfrm>
-          <a:prstGeom prst="rect">
-            <a:avLst/>
-          </a:prstGeom>
-          <a:noFill/>
-          <a:ln/>
-        </p:spPr>
-        <p:txBody>
-          <a:bodyPr wrap="square" lIns="0" tIns="0" rIns="0" bIns="0" rtlCol="0" anchor="ctr"/>
-          <a:lstStyle/>
-          <a:p>
-            <a:pPr indent="0" marL="0">
-              <a:buNone/>
-            </a:pPr>
-            <a:r>
-              <a:rPr lang="en-US" sz="1200" dirty="0">
+            <a:off x="685800" y="4709160"/>
+            <a:ext cx="3364992" cy="320040"/>
+          </a:xfrm>
+          <a:prstGeom prst="rect">
+            <a:avLst/>
+          </a:prstGeom>
+          <a:noFill/>
+          <a:ln/>
+        </p:spPr>
+        <p:txBody>
+          <a:bodyPr wrap="square" lIns="0" tIns="0" rIns="0" bIns="0" rtlCol="0" anchor="ctr"/>
+          <a:lstStyle/>
+          <a:p>
+            <a:pPr indent="0" marL="0">
+              <a:buNone/>
+            </a:pPr>
+            <a:r>
+              <a:rPr lang="en-US" sz="1250" dirty="0">
                 <a:solidFill>
                   <a:srgbClr val="6E7772"/>
                 </a:solidFill>
@@ -3223,9 +3236,9 @@
                 <a:ea typeface="Microsoft JhengHei" pitchFamily="34" charset="-122"/>
                 <a:cs typeface="Microsoft JhengHei" pitchFamily="34" charset="-120"/>
               </a:rPr>
-              <a:t>手寫筆記本機 OCR</a:t>
-            </a:r>
-            <a:endParaRPr lang="en-US" sz="1200" dirty="0"/>
+              <a:t>手寫筆記在本機 OCR</a:t>
+            </a:r>
+            <a:endParaRPr lang="en-US" sz="1250" dirty="0"/>
           </a:p>
         </p:txBody>
       </p:sp>
@@ -3237,24 +3250,24 @@
         </p:nvSpPr>
         <p:spPr>
           <a:xfrm>
-            <a:off x="3392424" y="4069080"/>
-            <a:ext cx="2468880" cy="640080"/>
-          </a:xfrm>
-          <a:prstGeom prst="rect">
-            <a:avLst/>
-          </a:prstGeom>
-          <a:noFill/>
-          <a:ln/>
-        </p:spPr>
-        <p:txBody>
-          <a:bodyPr wrap="square" lIns="0" tIns="0" rIns="0" bIns="0" rtlCol="0" anchor="ctr"/>
-          <a:lstStyle/>
-          <a:p>
-            <a:pPr indent="0" marL="0">
-              <a:buNone/>
-            </a:pPr>
-            <a:r>
-              <a:rPr lang="en-US" sz="3200" b="1" dirty="0">
+            <a:off x="4343400" y="4069080"/>
+            <a:ext cx="3364992" cy="640080"/>
+          </a:xfrm>
+          <a:prstGeom prst="rect">
+            <a:avLst/>
+          </a:prstGeom>
+          <a:noFill/>
+          <a:ln/>
+        </p:spPr>
+        <p:txBody>
+          <a:bodyPr wrap="square" lIns="0" tIns="0" rIns="0" bIns="0" rtlCol="0" anchor="ctr"/>
+          <a:lstStyle/>
+          <a:p>
+            <a:pPr indent="0" marL="0">
+              <a:buNone/>
+            </a:pPr>
+            <a:r>
+              <a:rPr lang="en-US" sz="3400" b="1" dirty="0">
                 <a:solidFill>
                   <a:srgbClr val="2F6B3E"/>
                 </a:solidFill>
@@ -3264,7 +3277,7 @@
               </a:rPr>
               <a:t>63</a:t>
             </a:r>
-            <a:endParaRPr lang="en-US" sz="3200" dirty="0"/>
+            <a:endParaRPr lang="en-US" sz="3400" dirty="0"/>
           </a:p>
         </p:txBody>
       </p:sp>
@@ -3276,24 +3289,24 @@
         </p:nvSpPr>
         <p:spPr>
           <a:xfrm>
-            <a:off x="3392424" y="4681728"/>
-            <a:ext cx="2468880" cy="320040"/>
-          </a:xfrm>
-          <a:prstGeom prst="rect">
-            <a:avLst/>
-          </a:prstGeom>
-          <a:noFill/>
-          <a:ln/>
-        </p:spPr>
-        <p:txBody>
-          <a:bodyPr wrap="square" lIns="0" tIns="0" rIns="0" bIns="0" rtlCol="0" anchor="ctr"/>
-          <a:lstStyle/>
-          <a:p>
-            <a:pPr indent="0" marL="0">
-              <a:buNone/>
-            </a:pPr>
-            <a:r>
-              <a:rPr lang="en-US" sz="1200" dirty="0">
+            <a:off x="4343400" y="4709160"/>
+            <a:ext cx="3364992" cy="320040"/>
+          </a:xfrm>
+          <a:prstGeom prst="rect">
+            <a:avLst/>
+          </a:prstGeom>
+          <a:noFill/>
+          <a:ln/>
+        </p:spPr>
+        <p:txBody>
+          <a:bodyPr wrap="square" lIns="0" tIns="0" rIns="0" bIns="0" rtlCol="0" anchor="ctr"/>
+          <a:lstStyle/>
+          <a:p>
+            <a:pPr indent="0" marL="0">
+              <a:buNone/>
+            </a:pPr>
+            <a:r>
+              <a:rPr lang="en-US" sz="1250" dirty="0">
                 <a:solidFill>
                   <a:srgbClr val="6E7772"/>
                 </a:solidFill>
@@ -3303,7 +3316,7 @@
               </a:rPr>
               <a:t>概念節點 · 4 門課</a:t>
             </a:r>
-            <a:endParaRPr lang="en-US" sz="1200" dirty="0"/>
+            <a:endParaRPr lang="en-US" sz="1250" dirty="0"/>
           </a:p>
         </p:txBody>
       </p:sp>
@@ -3315,24 +3328,24 @@
         </p:nvSpPr>
         <p:spPr>
           <a:xfrm>
-            <a:off x="6099048" y="4069080"/>
-            <a:ext cx="2468880" cy="640080"/>
-          </a:xfrm>
-          <a:prstGeom prst="rect">
-            <a:avLst/>
-          </a:prstGeom>
-          <a:noFill/>
-          <a:ln/>
-        </p:spPr>
-        <p:txBody>
-          <a:bodyPr wrap="square" lIns="0" tIns="0" rIns="0" bIns="0" rtlCol="0" anchor="ctr"/>
-          <a:lstStyle/>
-          <a:p>
-            <a:pPr indent="0" marL="0">
-              <a:buNone/>
-            </a:pPr>
-            <a:r>
-              <a:rPr lang="en-US" sz="3200" b="1" dirty="0">
+            <a:off x="8001000" y="4069080"/>
+            <a:ext cx="3364992" cy="640080"/>
+          </a:xfrm>
+          <a:prstGeom prst="rect">
+            <a:avLst/>
+          </a:prstGeom>
+          <a:noFill/>
+          <a:ln/>
+        </p:spPr>
+        <p:txBody>
+          <a:bodyPr wrap="square" lIns="0" tIns="0" rIns="0" bIns="0" rtlCol="0" anchor="ctr"/>
+          <a:lstStyle/>
+          <a:p>
+            <a:pPr indent="0" marL="0">
+              <a:buNone/>
+            </a:pPr>
+            <a:r>
+              <a:rPr lang="en-US" sz="3400" b="1" dirty="0">
                 <a:solidFill>
                   <a:srgbClr val="2F6B3E"/>
                 </a:solidFill>
@@ -3342,7 +3355,7 @@
               </a:rPr>
               <a:t>61</a:t>
             </a:r>
-            <a:endParaRPr lang="en-US" sz="3200" dirty="0"/>
+            <a:endParaRPr lang="en-US" sz="3400" dirty="0"/>
           </a:p>
         </p:txBody>
       </p:sp>
@@ -3354,24 +3367,24 @@
         </p:nvSpPr>
         <p:spPr>
           <a:xfrm>
-            <a:off x="6099048" y="4681728"/>
-            <a:ext cx="2468880" cy="320040"/>
-          </a:xfrm>
-          <a:prstGeom prst="rect">
-            <a:avLst/>
-          </a:prstGeom>
-          <a:noFill/>
-          <a:ln/>
-        </p:spPr>
-        <p:txBody>
-          <a:bodyPr wrap="square" lIns="0" tIns="0" rIns="0" bIns="0" rtlCol="0" anchor="ctr"/>
-          <a:lstStyle/>
-          <a:p>
-            <a:pPr indent="0" marL="0">
-              <a:buNone/>
-            </a:pPr>
-            <a:r>
-              <a:rPr lang="en-US" sz="1200" dirty="0">
+            <a:off x="8001000" y="4709160"/>
+            <a:ext cx="3364992" cy="320040"/>
+          </a:xfrm>
+          <a:prstGeom prst="rect">
+            <a:avLst/>
+          </a:prstGeom>
+          <a:noFill/>
+          <a:ln/>
+        </p:spPr>
+        <p:txBody>
+          <a:bodyPr wrap="square" lIns="0" tIns="0" rIns="0" bIns="0" rtlCol="0" anchor="ctr"/>
+          <a:lstStyle/>
+          <a:p>
+            <a:pPr indent="0" marL="0">
+              <a:buNone/>
+            </a:pPr>
+            <a:r>
+              <a:rPr lang="en-US" sz="1250" dirty="0">
                 <a:solidFill>
                   <a:srgbClr val="6E7772"/>
                 </a:solidFill>
@@ -3379,93 +3392,15 @@
                 <a:ea typeface="Microsoft JhengHei" pitchFamily="34" charset="-122"/>
                 <a:cs typeface="Microsoft JhengHei" pitchFamily="34" charset="-120"/>
               </a:rPr>
-              <a:t>自動化測試</a:t>
-            </a:r>
-            <a:endParaRPr lang="en-US" sz="1200" dirty="0"/>
+              <a:t>自動化測試全數通過</a:t>
+            </a:r>
+            <a:endParaRPr lang="en-US" sz="1250" dirty="0"/>
           </a:p>
         </p:txBody>
       </p:sp>
       <p:sp>
         <p:nvSpPr>
           <p:cNvPr id="20" name="Text 18"/>
-          <p:cNvSpPr/>
-          <p:nvPr/>
-        </p:nvSpPr>
-        <p:spPr>
-          <a:xfrm>
-            <a:off x="8805672" y="4069080"/>
-            <a:ext cx="2468880" cy="640080"/>
-          </a:xfrm>
-          <a:prstGeom prst="rect">
-            <a:avLst/>
-          </a:prstGeom>
-          <a:noFill/>
-          <a:ln/>
-        </p:spPr>
-        <p:txBody>
-          <a:bodyPr wrap="square" lIns="0" tIns="0" rIns="0" bIns="0" rtlCol="0" anchor="ctr"/>
-          <a:lstStyle/>
-          <a:p>
-            <a:pPr indent="0" marL="0">
-              <a:buNone/>
-            </a:pPr>
-            <a:r>
-              <a:rPr lang="en-US" sz="3200" b="1" dirty="0">
-                <a:solidFill>
-                  <a:srgbClr val="2F6B3E"/>
-                </a:solidFill>
-                <a:latin typeface="Microsoft JhengHei" pitchFamily="34" charset="0"/>
-                <a:ea typeface="Microsoft JhengHei" pitchFamily="34" charset="-122"/>
-                <a:cs typeface="Microsoft JhengHei" pitchFamily="34" charset="-120"/>
-              </a:rPr>
-              <a:t>7,000+</a:t>
-            </a:r>
-            <a:endParaRPr lang="en-US" sz="3200" dirty="0"/>
-          </a:p>
-        </p:txBody>
-      </p:sp>
-      <p:sp>
-        <p:nvSpPr>
-          <p:cNvPr id="21" name="Text 19"/>
-          <p:cNvSpPr/>
-          <p:nvPr/>
-        </p:nvSpPr>
-        <p:spPr>
-          <a:xfrm>
-            <a:off x="8805672" y="4681728"/>
-            <a:ext cx="2468880" cy="320040"/>
-          </a:xfrm>
-          <a:prstGeom prst="rect">
-            <a:avLst/>
-          </a:prstGeom>
-          <a:noFill/>
-          <a:ln/>
-        </p:spPr>
-        <p:txBody>
-          <a:bodyPr wrap="square" lIns="0" tIns="0" rIns="0" bIns="0" rtlCol="0" anchor="ctr"/>
-          <a:lstStyle/>
-          <a:p>
-            <a:pPr indent="0" marL="0">
-              <a:buNone/>
-            </a:pPr>
-            <a:r>
-              <a:rPr lang="en-US" sz="1200" dirty="0">
-                <a:solidFill>
-                  <a:srgbClr val="6E7772"/>
-                </a:solidFill>
-                <a:latin typeface="Microsoft JhengHei" pitchFamily="34" charset="0"/>
-                <a:ea typeface="Microsoft JhengHei" pitchFamily="34" charset="-122"/>
-                <a:cs typeface="Microsoft JhengHei" pitchFamily="34" charset="-120"/>
-              </a:rPr>
-              <a:t>行 Python / TypeScript</a:t>
-            </a:r>
-            <a:endParaRPr lang="en-US" sz="1200" dirty="0"/>
-          </a:p>
-        </p:txBody>
-      </p:sp>
-      <p:sp>
-        <p:nvSpPr>
-          <p:cNvPr id="22" name="Text 20"/>
           <p:cNvSpPr/>
           <p:nvPr/>
         </p:nvSpPr>
@@ -3504,7 +3439,7 @@
       </p:sp>
       <p:sp>
         <p:nvSpPr>
-          <p:cNvPr id="23" name="Text 21"/>
+          <p:cNvPr id="21" name="Text 19"/>
           <p:cNvSpPr/>
           <p:nvPr/>
         </p:nvSpPr>
@@ -5453,7 +5388,7 @@
                 <a:ea typeface="Microsoft JhengHei" pitchFamily="34" charset="-122"/>
                 <a:cs typeface="Microsoft JhengHei" pitchFamily="34" charset="-120"/>
               </a:rPr>
-              <a:t>解法一：技能樹</a:t>
+              <a:t>我第一個想要的東西</a:t>
             </a:r>
             <a:endParaRPr lang="en-US" sz="1300" dirty="0"/>
           </a:p>
@@ -6079,7 +6014,7 @@
                 <a:ea typeface="Microsoft JhengHei" pitchFamily="34" charset="-122"/>
                 <a:cs typeface="Microsoft JhengHei" pitchFamily="34" charset="-120"/>
               </a:rPr>
-              <a:t>解法二：卡關歸因 —— 整場最重要的一頁</a:t>
+              <a:t>但知道今天念哪裡，還是不知道我卡在哪</a:t>
             </a:r>
             <a:endParaRPr lang="en-US" sz="1300" dirty="0"/>
           </a:p>
@@ -6516,7 +6451,7 @@
                 <a:ea typeface="Microsoft JhengHei" pitchFamily="34" charset="-122"/>
                 <a:cs typeface="Microsoft JhengHei" pitchFamily="34" charset="-120"/>
               </a:rPr>
-              <a:t>為什麼要有測驗</a:t>
+              <a:t>那我怎麼確認我真的會了？</a:t>
             </a:r>
             <a:endParaRPr lang="en-US" sz="1300" dirty="0"/>
           </a:p>
@@ -7112,7 +7047,7 @@
                 <a:ea typeface="Microsoft JhengHei" pitchFamily="34" charset="-122"/>
                 <a:cs typeface="Microsoft JhengHei" pitchFamily="34" charset="-120"/>
               </a:rPr>
-              <a:t>解法三：錯的東西不會消失</a:t>
+              <a:t>今天會，不代表三天後還會</a:t>
             </a:r>
             <a:endParaRPr lang="en-US" sz="1300" dirty="0"/>
           </a:p>
@@ -7564,7 +7499,7 @@
                 <a:ea typeface="Microsoft JhengHei" pitchFamily="34" charset="-122"/>
                 <a:cs typeface="Microsoft JhengHei" pitchFamily="34" charset="-120"/>
               </a:rPr>
-              <a:t>然後我自己用了它一個學期</a:t>
+              <a:t>那它真的改變我的學習了嗎？</a:t>
             </a:r>
             <a:endParaRPr lang="en-US" sz="1300" dirty="0"/>
           </a:p>
@@ -7578,26 +7513,65 @@
         </p:nvSpPr>
         <p:spPr>
           <a:xfrm>
-            <a:off x="685800" y="1600200"/>
-            <a:ext cx="4572000" cy="365760"/>
-          </a:xfrm>
-          <a:prstGeom prst="rect">
-            <a:avLst/>
-          </a:prstGeom>
-          <a:noFill/>
-          <a:ln/>
-        </p:spPr>
-        <p:txBody>
-          <a:bodyPr wrap="square" lIns="0" tIns="0" rIns="0" bIns="0" rtlCol="0" anchor="ctr"/>
-          <a:lstStyle/>
-          <a:p>
-            <a:pPr indent="0" marL="0">
-              <a:buNone/>
-            </a:pPr>
-            <a:r>
-              <a:rPr lang="en-US" sz="1500" dirty="0">
-                <a:solidFill>
-                  <a:srgbClr val="8FA396"/>
+            <a:off x="685800" y="1481328"/>
+            <a:ext cx="5486400" cy="384048"/>
+          </a:xfrm>
+          <a:prstGeom prst="rect">
+            <a:avLst/>
+          </a:prstGeom>
+          <a:noFill/>
+          <a:ln/>
+        </p:spPr>
+        <p:txBody>
+          <a:bodyPr wrap="square" lIns="0" tIns="0" rIns="0" bIns="0" rtlCol="0" anchor="ctr"/>
+          <a:lstStyle/>
+          <a:p>
+            <a:pPr indent="0" marL="0">
+              <a:buNone/>
+            </a:pPr>
+            <a:r>
+              <a:rPr lang="en-US" sz="1700" b="1" dirty="0">
+                <a:solidFill>
+                  <a:srgbClr val="BFD6C4"/>
+                </a:solidFill>
+                <a:latin typeface="Microsoft JhengHei" pitchFamily="34" charset="0"/>
+                <a:ea typeface="Microsoft JhengHei" pitchFamily="34" charset="-122"/>
+                <a:cs typeface="Microsoft JhengHei" pitchFamily="34" charset="-120"/>
+              </a:rPr>
+              <a:t>這不是實驗數據，是我自己。</a:t>
+            </a:r>
+            <a:endParaRPr lang="en-US" sz="1700" dirty="0"/>
+          </a:p>
+        </p:txBody>
+      </p:sp>
+      <p:sp>
+        <p:nvSpPr>
+          <p:cNvPr id="5" name="Text 3"/>
+          <p:cNvSpPr/>
+          <p:nvPr/>
+        </p:nvSpPr>
+        <p:spPr>
+          <a:xfrm>
+            <a:off x="685800" y="1901952"/>
+            <a:ext cx="4572000" cy="292608"/>
+          </a:xfrm>
+          <a:prstGeom prst="rect">
+            <a:avLst/>
+          </a:prstGeom>
+          <a:noFill/>
+          <a:ln/>
+        </p:spPr>
+        <p:txBody>
+          <a:bodyPr wrap="square" lIns="0" tIns="0" rIns="0" bIns="0" rtlCol="0" anchor="ctr"/>
+          <a:lstStyle/>
+          <a:p>
+            <a:pPr indent="0" marL="0">
+              <a:buNone/>
+            </a:pPr>
+            <a:r>
+              <a:rPr lang="en-US" sz="1300" dirty="0">
+                <a:solidFill>
+                  <a:srgbClr val="7E9186"/>
                 </a:solidFill>
                 <a:latin typeface="Microsoft JhengHei" pitchFamily="34" charset="0"/>
                 <a:ea typeface="Microsoft JhengHei" pitchFamily="34" charset="-122"/>
@@ -7605,20 +7579,20 @@
               </a:rPr>
               <a:t>班級排名</a:t>
             </a:r>
-            <a:endParaRPr lang="en-US" sz="1500" dirty="0"/>
-          </a:p>
-        </p:txBody>
-      </p:sp>
-      <p:sp>
-        <p:nvSpPr>
-          <p:cNvPr id="5" name="Text 3"/>
-          <p:cNvSpPr/>
-          <p:nvPr/>
-        </p:nvSpPr>
-        <p:spPr>
-          <a:xfrm>
-            <a:off x="685800" y="2057400"/>
-            <a:ext cx="2103120" cy="1371600"/>
+            <a:endParaRPr lang="en-US" sz="1300" dirty="0"/>
+          </a:p>
+        </p:txBody>
+      </p:sp>
+      <p:sp>
+        <p:nvSpPr>
+          <p:cNvPr id="6" name="Text 4"/>
+          <p:cNvSpPr/>
+          <p:nvPr/>
+        </p:nvSpPr>
+        <p:spPr>
+          <a:xfrm>
+            <a:off x="685800" y="2212848"/>
+            <a:ext cx="2194560" cy="1600200"/>
           </a:xfrm>
           <a:prstGeom prst="rect">
             <a:avLst/>
@@ -7634,7 +7608,124 @@
               <a:buNone/>
             </a:pPr>
             <a:r>
-              <a:rPr lang="en-US" sz="8800" b="1" dirty="0">
+              <a:rPr lang="en-US" sz="10400" b="1" dirty="0">
+                <a:solidFill>
+                  <a:srgbClr val="6E8375"/>
+                </a:solidFill>
+                <a:latin typeface="Microsoft JhengHei" pitchFamily="34" charset="0"/>
+                <a:ea typeface="Microsoft JhengHei" pitchFamily="34" charset="-122"/>
+                <a:cs typeface="Microsoft JhengHei" pitchFamily="34" charset="-120"/>
+              </a:rPr>
+              <a:t>22</a:t>
+            </a:r>
+            <a:endParaRPr lang="en-US" sz="10400" dirty="0"/>
+          </a:p>
+        </p:txBody>
+      </p:sp>
+      <p:sp>
+        <p:nvSpPr>
+          <p:cNvPr id="7" name="Text 5"/>
+          <p:cNvSpPr/>
+          <p:nvPr/>
+        </p:nvSpPr>
+        <p:spPr>
+          <a:xfrm>
+            <a:off x="2880360" y="2212848"/>
+            <a:ext cx="914400" cy="1600200"/>
+          </a:xfrm>
+          <a:prstGeom prst="rect">
+            <a:avLst/>
+          </a:prstGeom>
+          <a:noFill/>
+          <a:ln/>
+        </p:spPr>
+        <p:txBody>
+          <a:bodyPr wrap="square" lIns="0" tIns="0" rIns="0" bIns="0" rtlCol="0" anchor="ctr"/>
+          <a:lstStyle/>
+          <a:p>
+            <a:pPr algn="ctr" indent="0" marL="0">
+              <a:buNone/>
+            </a:pPr>
+            <a:r>
+              <a:rPr lang="en-US" sz="4600" dirty="0">
+                <a:solidFill>
+                  <a:srgbClr val="5C6F63"/>
+                </a:solidFill>
+                <a:latin typeface="Microsoft JhengHei" pitchFamily="34" charset="0"/>
+                <a:ea typeface="Microsoft JhengHei" pitchFamily="34" charset="-122"/>
+                <a:cs typeface="Microsoft JhengHei" pitchFamily="34" charset="-120"/>
+              </a:rPr>
+              <a:t>→</a:t>
+            </a:r>
+            <a:endParaRPr lang="en-US" sz="4600" dirty="0"/>
+          </a:p>
+        </p:txBody>
+      </p:sp>
+      <p:sp>
+        <p:nvSpPr>
+          <p:cNvPr id="8" name="Text 6"/>
+          <p:cNvSpPr/>
+          <p:nvPr/>
+        </p:nvSpPr>
+        <p:spPr>
+          <a:xfrm>
+            <a:off x="3794760" y="2212848"/>
+            <a:ext cx="2194560" cy="1600200"/>
+          </a:xfrm>
+          <a:prstGeom prst="rect">
+            <a:avLst/>
+          </a:prstGeom>
+          <a:noFill/>
+          <a:ln/>
+        </p:spPr>
+        <p:txBody>
+          <a:bodyPr wrap="square" lIns="0" tIns="0" rIns="0" bIns="0" rtlCol="0" anchor="ctr"/>
+          <a:lstStyle/>
+          <a:p>
+            <a:pPr algn="ctr" indent="0" marL="0">
+              <a:buNone/>
+            </a:pPr>
+            <a:r>
+              <a:rPr lang="en-US" sz="10400" b="1" dirty="0">
+                <a:solidFill>
+                  <a:srgbClr val="FFFFFF"/>
+                </a:solidFill>
+                <a:latin typeface="Microsoft JhengHei" pitchFamily="34" charset="0"/>
+                <a:ea typeface="Microsoft JhengHei" pitchFamily="34" charset="-122"/>
+                <a:cs typeface="Microsoft JhengHei" pitchFamily="34" charset="-120"/>
+              </a:rPr>
+              <a:t>10</a:t>
+            </a:r>
+            <a:endParaRPr lang="en-US" sz="10400" dirty="0"/>
+          </a:p>
+        </p:txBody>
+      </p:sp>
+      <p:sp>
+        <p:nvSpPr>
+          <p:cNvPr id="9" name="Text 7"/>
+          <p:cNvSpPr/>
+          <p:nvPr/>
+        </p:nvSpPr>
+        <p:spPr>
+          <a:xfrm>
+            <a:off x="685800" y="3840480"/>
+            <a:ext cx="2194560" cy="320040"/>
+          </a:xfrm>
+          <a:prstGeom prst="rect">
+            <a:avLst/>
+          </a:prstGeom>
+          <a:noFill/>
+          <a:ln/>
+        </p:spPr>
+        <p:txBody>
+          <a:bodyPr wrap="square" lIns="0" tIns="0" rIns="0" bIns="0" rtlCol="0" anchor="ctr"/>
+          <a:lstStyle/>
+          <a:p>
+            <a:pPr algn="ctr" indent="0" marL="0">
+              <a:buNone/>
+            </a:pPr>
+            <a:r>
+              <a:rPr lang="en-US" sz="1250" dirty="0">
                 <a:solidFill>
                   <a:srgbClr val="7E9186"/>
                 </a:solidFill>
@@ -7642,22 +7733,22 @@
                 <a:ea typeface="Microsoft JhengHei" pitchFamily="34" charset="-122"/>
                 <a:cs typeface="Microsoft JhengHei" pitchFamily="34" charset="-120"/>
               </a:rPr>
-              <a:t>22</a:t>
-            </a:r>
-            <a:endParaRPr lang="en-US" sz="8800" dirty="0"/>
-          </a:p>
-        </p:txBody>
-      </p:sp>
-      <p:sp>
-        <p:nvSpPr>
-          <p:cNvPr id="6" name="Text 4"/>
-          <p:cNvSpPr/>
-          <p:nvPr/>
-        </p:nvSpPr>
-        <p:spPr>
-          <a:xfrm>
-            <a:off x="2834640" y="2057400"/>
-            <a:ext cx="914400" cy="1371600"/>
+              <a:t>上學期 22 / 51</a:t>
+            </a:r>
+            <a:endParaRPr lang="en-US" sz="1250" dirty="0"/>
+          </a:p>
+        </p:txBody>
+      </p:sp>
+      <p:sp>
+        <p:nvSpPr>
+          <p:cNvPr id="10" name="Text 8"/>
+          <p:cNvSpPr/>
+          <p:nvPr/>
+        </p:nvSpPr>
+        <p:spPr>
+          <a:xfrm>
+            <a:off x="3794760" y="3840480"/>
+            <a:ext cx="2194560" cy="320040"/>
           </a:xfrm>
           <a:prstGeom prst="rect">
             <a:avLst/>
@@ -7673,124 +7764,7 @@
               <a:buNone/>
             </a:pPr>
             <a:r>
-              <a:rPr lang="en-US" sz="4400" dirty="0">
-                <a:solidFill>
-                  <a:srgbClr val="5C6F63"/>
-                </a:solidFill>
-                <a:latin typeface="Microsoft JhengHei" pitchFamily="34" charset="0"/>
-                <a:ea typeface="Microsoft JhengHei" pitchFamily="34" charset="-122"/>
-                <a:cs typeface="Microsoft JhengHei" pitchFamily="34" charset="-120"/>
-              </a:rPr>
-              <a:t>→</a:t>
-            </a:r>
-            <a:endParaRPr lang="en-US" sz="4400" dirty="0"/>
-          </a:p>
-        </p:txBody>
-      </p:sp>
-      <p:sp>
-        <p:nvSpPr>
-          <p:cNvPr id="7" name="Text 5"/>
-          <p:cNvSpPr/>
-          <p:nvPr/>
-        </p:nvSpPr>
-        <p:spPr>
-          <a:xfrm>
-            <a:off x="3794760" y="2057400"/>
-            <a:ext cx="2103120" cy="1371600"/>
-          </a:xfrm>
-          <a:prstGeom prst="rect">
-            <a:avLst/>
-          </a:prstGeom>
-          <a:noFill/>
-          <a:ln/>
-        </p:spPr>
-        <p:txBody>
-          <a:bodyPr wrap="square" lIns="0" tIns="0" rIns="0" bIns="0" rtlCol="0" anchor="ctr"/>
-          <a:lstStyle/>
-          <a:p>
-            <a:pPr algn="ctr" indent="0" marL="0">
-              <a:buNone/>
-            </a:pPr>
-            <a:r>
-              <a:rPr lang="en-US" sz="8800" b="1" dirty="0">
-                <a:solidFill>
-                  <a:srgbClr val="FFFFFF"/>
-                </a:solidFill>
-                <a:latin typeface="Microsoft JhengHei" pitchFamily="34" charset="0"/>
-                <a:ea typeface="Microsoft JhengHei" pitchFamily="34" charset="-122"/>
-                <a:cs typeface="Microsoft JhengHei" pitchFamily="34" charset="-120"/>
-              </a:rPr>
-              <a:t>10</a:t>
-            </a:r>
-            <a:endParaRPr lang="en-US" sz="8800" dirty="0"/>
-          </a:p>
-        </p:txBody>
-      </p:sp>
-      <p:sp>
-        <p:nvSpPr>
-          <p:cNvPr id="8" name="Text 6"/>
-          <p:cNvSpPr/>
-          <p:nvPr/>
-        </p:nvSpPr>
-        <p:spPr>
-          <a:xfrm>
-            <a:off x="685800" y="3474720"/>
-            <a:ext cx="2103120" cy="320040"/>
-          </a:xfrm>
-          <a:prstGeom prst="rect">
-            <a:avLst/>
-          </a:prstGeom>
-          <a:noFill/>
-          <a:ln/>
-        </p:spPr>
-        <p:txBody>
-          <a:bodyPr wrap="square" lIns="0" tIns="0" rIns="0" bIns="0" rtlCol="0" anchor="ctr"/>
-          <a:lstStyle/>
-          <a:p>
-            <a:pPr algn="ctr" indent="0" marL="0">
-              <a:buNone/>
-            </a:pPr>
-            <a:r>
-              <a:rPr lang="en-US" sz="1200" dirty="0">
-                <a:solidFill>
-                  <a:srgbClr val="7E9186"/>
-                </a:solidFill>
-                <a:latin typeface="Microsoft JhengHei" pitchFamily="34" charset="0"/>
-                <a:ea typeface="Microsoft JhengHei" pitchFamily="34" charset="-122"/>
-                <a:cs typeface="Microsoft JhengHei" pitchFamily="34" charset="-120"/>
-              </a:rPr>
-              <a:t>上學期 22 / 51</a:t>
-            </a:r>
-            <a:endParaRPr lang="en-US" sz="1200" dirty="0"/>
-          </a:p>
-        </p:txBody>
-      </p:sp>
-      <p:sp>
-        <p:nvSpPr>
-          <p:cNvPr id="9" name="Text 7"/>
-          <p:cNvSpPr/>
-          <p:nvPr/>
-        </p:nvSpPr>
-        <p:spPr>
-          <a:xfrm>
-            <a:off x="3794760" y="3474720"/>
-            <a:ext cx="2103120" cy="320040"/>
-          </a:xfrm>
-          <a:prstGeom prst="rect">
-            <a:avLst/>
-          </a:prstGeom>
-          <a:noFill/>
-          <a:ln/>
-        </p:spPr>
-        <p:txBody>
-          <a:bodyPr wrap="square" lIns="0" tIns="0" rIns="0" bIns="0" rtlCol="0" anchor="ctr"/>
-          <a:lstStyle/>
-          <a:p>
-            <a:pPr algn="ctr" indent="0" marL="0">
-              <a:buNone/>
-            </a:pPr>
-            <a:r>
-              <a:rPr lang="en-US" sz="1200" b="1" dirty="0">
+              <a:rPr lang="en-US" sz="1250" b="1" dirty="0">
                 <a:solidFill>
                   <a:srgbClr val="BFD6C4"/>
                 </a:solidFill>
@@ -7800,24 +7774,24 @@
               </a:rPr>
               <a:t>本學期 第 10 名</a:t>
             </a:r>
-            <a:endParaRPr lang="en-US" sz="1200" dirty="0"/>
-          </a:p>
-        </p:txBody>
-      </p:sp>
-      <p:sp>
-        <p:nvSpPr>
-          <p:cNvPr id="10" name="Shape 8"/>
-          <p:cNvSpPr/>
-          <p:nvPr/>
-        </p:nvSpPr>
-        <p:spPr>
-          <a:xfrm>
-            <a:off x="6583680" y="1600200"/>
-            <a:ext cx="4919472" cy="2240280"/>
+            <a:endParaRPr lang="en-US" sz="1250" dirty="0"/>
+          </a:p>
+        </p:txBody>
+      </p:sp>
+      <p:sp>
+        <p:nvSpPr>
+          <p:cNvPr id="11" name="Shape 9"/>
+          <p:cNvSpPr/>
+          <p:nvPr/>
+        </p:nvSpPr>
+        <p:spPr>
+          <a:xfrm>
+            <a:off x="6583680" y="1481328"/>
+            <a:ext cx="4919472" cy="2423160"/>
           </a:xfrm>
           <a:prstGeom prst="roundRect">
             <a:avLst>
-              <a:gd name="adj" fmla="val 4898"/>
+              <a:gd name="adj" fmla="val 4528"/>
             </a:avLst>
           </a:prstGeom>
           <a:solidFill>
@@ -7833,13 +7807,13 @@
       </p:sp>
       <p:sp>
         <p:nvSpPr>
-          <p:cNvPr id="11" name="Text 9"/>
-          <p:cNvSpPr/>
-          <p:nvPr/>
-        </p:nvSpPr>
-        <p:spPr>
-          <a:xfrm>
-            <a:off x="6858000" y="1783080"/>
+          <p:cNvPr id="12" name="Text 10"/>
+          <p:cNvSpPr/>
+          <p:nvPr/>
+        </p:nvSpPr>
+        <p:spPr>
+          <a:xfrm>
+            <a:off x="6858000" y="1691640"/>
             <a:ext cx="4389120" cy="292608"/>
           </a:xfrm>
           <a:prstGeom prst="rect">
@@ -7872,14 +7846,14 @@
       </p:sp>
       <p:sp>
         <p:nvSpPr>
-          <p:cNvPr id="12" name="Text 10"/>
-          <p:cNvSpPr/>
-          <p:nvPr/>
-        </p:nvSpPr>
-        <p:spPr>
-          <a:xfrm>
-            <a:off x="6858000" y="2194560"/>
-            <a:ext cx="4389120" cy="1554480"/>
+          <p:cNvPr id="13" name="Text 11"/>
+          <p:cNvSpPr/>
+          <p:nvPr/>
+        </p:nvSpPr>
+        <p:spPr>
+          <a:xfrm>
+            <a:off x="6858000" y="2121408"/>
+            <a:ext cx="4389120" cy="1691640"/>
           </a:xfrm>
           <a:prstGeom prst="rect">
             <a:avLst/>
@@ -7978,7 +7952,7 @@
       </p:sp>
       <p:sp>
         <p:nvSpPr>
-          <p:cNvPr id="13" name="Shape 11"/>
+          <p:cNvPr id="14" name="Shape 12"/>
           <p:cNvSpPr/>
           <p:nvPr/>
         </p:nvSpPr>
@@ -8005,7 +7979,7 @@
       </p:sp>
       <p:sp>
         <p:nvSpPr>
-          <p:cNvPr id="14" name="Text 12"/>
+          <p:cNvPr id="15" name="Text 13"/>
           <p:cNvSpPr/>
           <p:nvPr/>
         </p:nvSpPr>

--- a/AdaptLearn-6min.pptx
+++ b/AdaptLearn-6min.pptx
@@ -3189,7 +3189,7 @@
               <a:buNone/>
             </a:pPr>
             <a:r>
-              <a:rPr lang="en-US" sz="3400" b="1" dirty="0">
+              <a:rPr lang="en-US" sz="3100" b="1" dirty="0">
                 <a:solidFill>
                   <a:srgbClr val="2F6B3E"/>
                 </a:solidFill>
@@ -3199,7 +3199,7 @@
               </a:rPr>
               <a:t>28 頁</a:t>
             </a:r>
-            <a:endParaRPr lang="en-US" sz="3400" dirty="0"/>
+            <a:endParaRPr lang="en-US" sz="3100" dirty="0"/>
           </a:p>
         </p:txBody>
       </p:sp>
@@ -3212,23 +3212,26 @@
         <p:spPr>
           <a:xfrm>
             <a:off x="685800" y="4709160"/>
-            <a:ext cx="3364992" cy="320040"/>
-          </a:xfrm>
-          <a:prstGeom prst="rect">
-            <a:avLst/>
-          </a:prstGeom>
-          <a:noFill/>
-          <a:ln/>
-        </p:spPr>
-        <p:txBody>
-          <a:bodyPr wrap="square" lIns="0" tIns="0" rIns="0" bIns="0" rtlCol="0" anchor="ctr"/>
-          <a:lstStyle/>
-          <a:p>
-            <a:pPr indent="0" marL="0">
-              <a:buNone/>
-            </a:pPr>
-            <a:r>
-              <a:rPr lang="en-US" sz="1250" dirty="0">
+            <a:ext cx="3364992" cy="548640"/>
+          </a:xfrm>
+          <a:prstGeom prst="rect">
+            <a:avLst/>
+          </a:prstGeom>
+          <a:noFill/>
+          <a:ln/>
+        </p:spPr>
+        <p:txBody>
+          <a:bodyPr wrap="square" lIns="0" tIns="0" rIns="0" bIns="0" rtlCol="0" anchor="t"/>
+          <a:lstStyle/>
+          <a:p>
+            <a:pPr indent="0" marL="0">
+              <a:lnSpc>
+                <a:spcPts val="1700"/>
+              </a:lnSpc>
+              <a:buNone/>
+            </a:pPr>
+            <a:r>
+              <a:rPr lang="en-US" sz="1150" dirty="0">
                 <a:solidFill>
                   <a:srgbClr val="6E7772"/>
                 </a:solidFill>
@@ -3238,7 +3241,7 @@
               </a:rPr>
               <a:t>手寫筆記在本機 OCR</a:t>
             </a:r>
-            <a:endParaRPr lang="en-US" sz="1250" dirty="0"/>
+            <a:endParaRPr lang="en-US" sz="1150" dirty="0"/>
           </a:p>
         </p:txBody>
       </p:sp>
@@ -3267,7 +3270,7 @@
               <a:buNone/>
             </a:pPr>
             <a:r>
-              <a:rPr lang="en-US" sz="3400" b="1" dirty="0">
+              <a:rPr lang="en-US" sz="3100" b="1" dirty="0">
                 <a:solidFill>
                   <a:srgbClr val="2F6B3E"/>
                 </a:solidFill>
@@ -3277,7 +3280,7 @@
               </a:rPr>
               <a:t>63</a:t>
             </a:r>
-            <a:endParaRPr lang="en-US" sz="3400" dirty="0"/>
+            <a:endParaRPr lang="en-US" sz="3100" dirty="0"/>
           </a:p>
         </p:txBody>
       </p:sp>
@@ -3290,23 +3293,26 @@
         <p:spPr>
           <a:xfrm>
             <a:off x="4343400" y="4709160"/>
-            <a:ext cx="3364992" cy="320040"/>
-          </a:xfrm>
-          <a:prstGeom prst="rect">
-            <a:avLst/>
-          </a:prstGeom>
-          <a:noFill/>
-          <a:ln/>
-        </p:spPr>
-        <p:txBody>
-          <a:bodyPr wrap="square" lIns="0" tIns="0" rIns="0" bIns="0" rtlCol="0" anchor="ctr"/>
-          <a:lstStyle/>
-          <a:p>
-            <a:pPr indent="0" marL="0">
-              <a:buNone/>
-            </a:pPr>
-            <a:r>
-              <a:rPr lang="en-US" sz="1250" dirty="0">
+            <a:ext cx="3364992" cy="548640"/>
+          </a:xfrm>
+          <a:prstGeom prst="rect">
+            <a:avLst/>
+          </a:prstGeom>
+          <a:noFill/>
+          <a:ln/>
+        </p:spPr>
+        <p:txBody>
+          <a:bodyPr wrap="square" lIns="0" tIns="0" rIns="0" bIns="0" rtlCol="0" anchor="t"/>
+          <a:lstStyle/>
+          <a:p>
+            <a:pPr indent="0" marL="0">
+              <a:lnSpc>
+                <a:spcPts val="1700"/>
+              </a:lnSpc>
+              <a:buNone/>
+            </a:pPr>
+            <a:r>
+              <a:rPr lang="en-US" sz="1150" dirty="0">
                 <a:solidFill>
                   <a:srgbClr val="6E7772"/>
                 </a:solidFill>
@@ -3316,7 +3322,7 @@
               </a:rPr>
               <a:t>概念節點 · 4 門課</a:t>
             </a:r>
-            <a:endParaRPr lang="en-US" sz="1250" dirty="0"/>
+            <a:endParaRPr lang="en-US" sz="1150" dirty="0"/>
           </a:p>
         </p:txBody>
       </p:sp>
@@ -3345,7 +3351,7 @@
               <a:buNone/>
             </a:pPr>
             <a:r>
-              <a:rPr lang="en-US" sz="3400" b="1" dirty="0">
+              <a:rPr lang="en-US" sz="3100" b="1" dirty="0">
                 <a:solidFill>
                   <a:srgbClr val="2F6B3E"/>
                 </a:solidFill>
@@ -3353,9 +3359,9 @@
                 <a:ea typeface="Microsoft JhengHei" pitchFamily="34" charset="-122"/>
                 <a:cs typeface="Microsoft JhengHei" pitchFamily="34" charset="-120"/>
               </a:rPr>
-              <a:t>61</a:t>
-            </a:r>
-            <a:endParaRPr lang="en-US" sz="3400" dirty="0"/>
+              <a:t>105 / 110</a:t>
+            </a:r>
+            <a:endParaRPr lang="en-US" sz="3100" dirty="0"/>
           </a:p>
         </p:txBody>
       </p:sp>
@@ -3368,23 +3374,26 @@
         <p:spPr>
           <a:xfrm>
             <a:off x="8001000" y="4709160"/>
-            <a:ext cx="3364992" cy="320040"/>
-          </a:xfrm>
-          <a:prstGeom prst="rect">
-            <a:avLst/>
-          </a:prstGeom>
-          <a:noFill/>
-          <a:ln/>
-        </p:spPr>
-        <p:txBody>
-          <a:bodyPr wrap="square" lIns="0" tIns="0" rIns="0" bIns="0" rtlCol="0" anchor="ctr"/>
-          <a:lstStyle/>
-          <a:p>
-            <a:pPr indent="0" marL="0">
-              <a:buNone/>
-            </a:pPr>
-            <a:r>
-              <a:rPr lang="en-US" sz="1250" dirty="0">
+            <a:ext cx="3364992" cy="548640"/>
+          </a:xfrm>
+          <a:prstGeom prst="rect">
+            <a:avLst/>
+          </a:prstGeom>
+          <a:noFill/>
+          <a:ln/>
+        </p:spPr>
+        <p:txBody>
+          <a:bodyPr wrap="square" lIns="0" tIns="0" rIns="0" bIns="0" rtlCol="0" anchor="t"/>
+          <a:lstStyle/>
+          <a:p>
+            <a:pPr indent="0" marL="0">
+              <a:lnSpc>
+                <a:spcPts val="1700"/>
+              </a:lnSpc>
+              <a:buNone/>
+            </a:pPr>
+            <a:r>
+              <a:rPr lang="en-US" sz="1150" dirty="0">
                 <a:solidFill>
                   <a:srgbClr val="6E7772"/>
                 </a:solidFill>
@@ -3392,9 +3401,9 @@
                 <a:ea typeface="Microsoft JhengHei" pitchFamily="34" charset="-122"/>
                 <a:cs typeface="Microsoft JhengHei" pitchFamily="34" charset="-120"/>
               </a:rPr>
-              <a:t>自動化測試全數通過</a:t>
-            </a:r>
-            <a:endParaRPr lang="en-US" sz="1250" dirty="0"/>
+              <a:t>自動化測試通過（5 條是待更新的舊整合測試）</a:t>
+            </a:r>
+            <a:endParaRPr lang="en-US" sz="1150" dirty="0"/>
           </a:p>
         </p:txBody>
       </p:sp>

--- a/AdaptLearn-6min.pptx
+++ b/AdaptLearn-6min.pptx
@@ -605,9 +605,9 @@
               <a:t>【橋接，語氣要像講一件意外的事】我原本只是想解決一門課的問題。
 結果當我把第二門、第三門課也放進去之後 ——
 系統自己在課與課之間拉出了連結。
-它發現手寫講義裡的「單範正交集」，跟另一門課的「正交集合」講的是同一件事，
-相似度 87%，標成等價概念。
-這些線沒有人教過它，是它從語意上自己找出來的。
+我手寫講義裡的「單範正交集」，跟另一門課的「正交集合」，
+被判為同一件事 —— 相似度 87%。這些線沒有人教過它。
+※ 數字要講清楚：畫面上的 37 條是這門課相關的；全部 4 門課共 44 條。
 （被問怎麼知道連結是對的：門檻 0.68 是用標註樣本實測分佈校準的。）</a:t>
             </a:r>
             <a:endParaRPr lang="en-US" dirty="0"/>
@@ -698,7 +698,7 @@
               <a:rPr lang="en-US" dirty="0"/>
               <a:t>【橋接】最後，我知道你們可能會懷疑：這是不是 AI 隨便生成出來的？
 所以我把 AI 的失敗也設計進去了。
-剛剛丟進去的是手寫講義，辨識是在我自己的電腦上跑的：離線、不用付費、不外傳。
+手寫辨識在我自己的筆電上跑，資料不外傳。
 AI 會失敗，所以我把失敗也設計進去：四層 OCR 備援鏈、防幻覺三道防線、
 還有一條誠實原則 —— OCR 失敗會明確告警，絕不靜默套模板假裝成功。
 這是我修過的真實 bug，教訓寫進了設計原則。</a:t>
@@ -883,7 +883,9 @@
               <a:rPr lang="en-US" dirty="0"/>
               <a:t>「我今天不想再做一個 AI 幫你回答問題的工具。」——講完停一秒。
 因為學生最大的問題，不是沒有答案，是不知道自己為什麼會錯。
-這件事我自己撞過一次：線性代數。前面向量矩陣都跟得上，學到正交、投影、SVD 整個卡住。考卷只會告訴我這題錯了，不會告訴我：你是因為第四章沒學好，第九章才會錯。</a:t>
+這件事我自己撞過一次：線性代數，前面向量、矩陣都跟得上，
+學到正交、投影、SVD 整個卡住。
+考卷只說「這題錯了」，不會說：你是第四章沒學好，第九章才會錯。</a:t>
             </a:r>
             <a:endParaRPr lang="en-US" dirty="0"/>
           </a:p>
@@ -1061,10 +1063,11 @@
           <a:p>
             <a:r>
               <a:rPr lang="en-US" dirty="0"/>
-              <a:t>我當然先去問 AI。Gemini 很好用，但我懶得整理，知識沒被留下來。
-後來改用 NotebookLM，它有心智圖，但心智圖畫的是「這個屬於那個」。
-我要的不是隸屬關係，是「我要先會什麼，才學得動這個」。
-這兩件事完全不一樣。沒有人做給我，所以我自己做了。</a:t>
+              <a:t>我當然先去問 AI。Gemini 很好用，但知識沒有被留下來 ——
+今天問完，明天忘記，它不知道我上禮拜問過什麼。
+後來改用 NotebookLM，它有心智圖。但心智圖畫的是「這個屬於那個」——隸屬關係。
+我要的是「我要先會什麼，才學得動這個」。這兩件事完全不一樣。
+沒有人做給我，所以我自己做了。</a:t>
             </a:r>
             <a:endParaRPr lang="en-US" dirty="0"/>
           </a:p>
@@ -1152,10 +1155,10 @@
           <a:p>
             <a:r>
               <a:rPr lang="en-US" dirty="0"/>
-              <a:t>這是我的網站。丟一份線性代數講義進去，它自己讀完，
+              <a:t>這是我的網站。我把一份線性代數講義丟進去，
 建出來的不是心智圖，是一棵技能樹。
 左邊基礎、右邊進階，箭頭永遠是先修 → 進階。
-每個概念三種狀態：綠色已掌握、發光代表現在可以學了、上鎖代表先修還沒完成。
+三種狀態：綠色已掌握、發光代表先修全綠現在可以學了、上鎖代表學了會撞牆。
 所以我不用想今天要念哪裡，它會告訴我今天可以念哪裡。
 【橋接，一定要講】但我很快又發現一個問題 ——</a:t>
             </a:r>
@@ -1342,12 +1345,10 @@
             <a:r>
               <a:rPr lang="en-US" dirty="0"/>
               <a:t>【橋接】但它說我卡在內積，我怎麼知道它說得對不對？
-如果我要確認自己到底會不會，光靠系統猜還是不夠 —— 我需要讓它考我。
-學習最好的方法是去教別人 —— 因為你會被問倒，
-那個答不出來的瞬間，就是你發現自己漏洞的瞬間。
-我在 NotebookLM 也會叫它出題考我，但每次都要自己打字，麻煩到我後來就懶了。
-所以在我的網站，這件事是內建的：系統挑我最弱的概念出題，不是隨機。
-作答是開放式的，由 AI 批改並指出推理斷在哪一步。</a:t>
+光靠系統推論還不夠 —— 我需要讓它考我。
+所以測驗是內建的：系統挑我最弱、最沒測過的概念出題，不是隨機。
+作答是開放式的，由 AI 批改，會指出我的推理是在哪一步斷掉的。
+每一次作答同時更新掌握度、技能樹狀態與複習排程 —— 是一個閉環。</a:t>
             </a:r>
             <a:endParaRPr lang="en-US" dirty="0"/>
           </a:p>
@@ -1436,9 +1437,10 @@
             <a:r>
               <a:rPr lang="en-US" dirty="0"/>
               <a:t>【橋接】但考完也還沒結束 —— 因為今天會，不代表三天後還會。
-答完之後，它用 FSRS-5 這套間隔重複演算法，
-根據作答歷史推估每個概念的記憶狀態，算出遺忘曲線，
-告訴我哪一天該回來複習。錯的東西不會消失，它會排隊等我回來。
+它用 FSRS-5 把我的作答歷史重放進記憶模型，
+算出每個概念「此刻還記得的機率」。
+所以今晚先讀什麼不是我排的，是遺忘曲線算出來的。
+錯的東西不會消失，它會排隊等我回來。
 （如果被問「為什麼是 FSRS-5」：因為我需要一個可以估「此刻回憶機率」的模型，
   才能拿它當排序依據。不要講「最新版本」。）</a:t>
             </a:r>
@@ -1530,10 +1532,10 @@
               <a:rPr lang="en-US" dirty="0"/>
               <a:t>【橋接】所以這套東西，真的改變我的學習了嗎？
 這不是實驗數據，是我自己。上學期班排 22，本學期第 10。（講完停一秒）
-做法是：先用診斷測驗找弱點，再照今晚該讀什麼與遺忘曲線複習。
+做法是：考前三週先用診斷測驗找出弱點，再照遺忘曲線排程複習。
+（四科 90 分以上投影片上有，不用再念一次。）
 誠實講：成績進步受多重因素影響，不能全歸因於單一工具。
-但它把「不知道自己哪裡不會」變成「明確的弱點清單與複習時點」，
-從反覆重讀已經會的，變成有計畫地補缺口。
+我能確定的是，我的複習方式從反覆重讀已經會的，變成有計畫地補缺口。
 ※ 這一句一定要講，評審在測的是誠實。</a:t>
             </a:r>
             <a:endParaRPr lang="en-US" dirty="0"/>
@@ -2295,8 +2297,8 @@
         </p:nvSpPr>
         <p:spPr>
           <a:xfrm>
-            <a:off x="9281160" y="1874520"/>
-            <a:ext cx="2084832" cy="658368"/>
+            <a:off x="9281160" y="1847088"/>
+            <a:ext cx="2084832" cy="621792"/>
           </a:xfrm>
           <a:prstGeom prst="rect">
             <a:avLst/>
@@ -2312,7 +2314,7 @@
               <a:buNone/>
             </a:pPr>
             <a:r>
-              <a:rPr lang="en-US" sz="4400" b="1" dirty="0">
+              <a:rPr lang="en-US" sz="4200" b="1" dirty="0">
                 <a:solidFill>
                   <a:srgbClr val="2F6B3E"/>
                 </a:solidFill>
@@ -2322,7 +2324,7 @@
               </a:rPr>
               <a:t>37</a:t>
             </a:r>
-            <a:endParaRPr lang="en-US" sz="4400" dirty="0"/>
+            <a:endParaRPr lang="en-US" sz="4200" dirty="0"/>
           </a:p>
         </p:txBody>
       </p:sp>
@@ -2334,8 +2336,8 @@
         </p:nvSpPr>
         <p:spPr>
           <a:xfrm>
-            <a:off x="9281160" y="2523744"/>
-            <a:ext cx="2084832" cy="274320"/>
+            <a:off x="9189720" y="2468880"/>
+            <a:ext cx="2267712" cy="256032"/>
           </a:xfrm>
           <a:prstGeom prst="rect">
             <a:avLst/>
@@ -2351,7 +2353,7 @@
               <a:buNone/>
             </a:pPr>
             <a:r>
-              <a:rPr lang="en-US" sz="1200" dirty="0">
+              <a:rPr lang="en-US" sz="1150" dirty="0">
                 <a:solidFill>
                   <a:srgbClr val="6E7772"/>
                 </a:solidFill>
@@ -2359,9 +2361,9 @@
                 <a:ea typeface="Microsoft JhengHei" pitchFamily="34" charset="-122"/>
                 <a:cs typeface="Microsoft JhengHei" pitchFamily="34" charset="-120"/>
               </a:rPr>
-              <a:t>條跨課程連結</a:t>
-            </a:r>
-            <a:endParaRPr lang="en-US" sz="1200" dirty="0"/>
+              <a:t>條跨課程連結（這門課相關）</a:t>
+            </a:r>
+            <a:endParaRPr lang="en-US" sz="1150" dirty="0"/>
           </a:p>
         </p:txBody>
       </p:sp>
@@ -2373,27 +2375,66 @@
         </p:nvSpPr>
         <p:spPr>
           <a:xfrm>
-            <a:off x="9281160" y="2852928"/>
-            <a:ext cx="2084832" cy="731520"/>
-          </a:xfrm>
-          <a:prstGeom prst="rect">
-            <a:avLst/>
-          </a:prstGeom>
-          <a:noFill/>
-          <a:ln/>
-        </p:spPr>
-        <p:txBody>
-          <a:bodyPr wrap="square" lIns="0" tIns="0" rIns="0" bIns="0" rtlCol="0" anchor="ctr"/>
+            <a:off x="9281160" y="2743200"/>
+            <a:ext cx="2084832" cy="256032"/>
+          </a:xfrm>
+          <a:prstGeom prst="rect">
+            <a:avLst/>
+          </a:prstGeom>
+          <a:noFill/>
+          <a:ln/>
+        </p:spPr>
+        <p:txBody>
+          <a:bodyPr wrap="square" lIns="0" tIns="0" rIns="0" bIns="0" rtlCol="0" anchor="ctr"/>
+          <a:lstStyle/>
+          <a:p>
+            <a:pPr algn="ctr" indent="0" marL="0">
+              <a:buNone/>
+            </a:pPr>
+            <a:r>
+              <a:rPr lang="en-US" sz="1150" dirty="0">
+                <a:solidFill>
+                  <a:srgbClr val="6E7772"/>
+                </a:solidFill>
+                <a:latin typeface="Microsoft JhengHei" pitchFamily="34" charset="0"/>
+                <a:ea typeface="Microsoft JhengHei" pitchFamily="34" charset="-122"/>
+                <a:cs typeface="Microsoft JhengHei" pitchFamily="34" charset="-120"/>
+              </a:rPr>
+              <a:t>全部 4 門課共 44 條</a:t>
+            </a:r>
+            <a:endParaRPr lang="en-US" sz="1150" dirty="0"/>
+          </a:p>
+        </p:txBody>
+      </p:sp>
+      <p:sp>
+        <p:nvSpPr>
+          <p:cNvPr id="10" name="Text 7"/>
+          <p:cNvSpPr/>
+          <p:nvPr/>
+        </p:nvSpPr>
+        <p:spPr>
+          <a:xfrm>
+            <a:off x="9281160" y="3054096"/>
+            <a:ext cx="2084832" cy="512064"/>
+          </a:xfrm>
+          <a:prstGeom prst="rect">
+            <a:avLst/>
+          </a:prstGeom>
+          <a:noFill/>
+          <a:ln/>
+        </p:spPr>
+        <p:txBody>
+          <a:bodyPr wrap="square" lIns="0" tIns="0" rIns="0" bIns="0" rtlCol="0" anchor="t"/>
           <a:lstStyle/>
           <a:p>
             <a:pPr algn="ctr" indent="0" marL="0">
               <a:lnSpc>
-                <a:spcPts val="2000"/>
+                <a:spcPts val="1800"/>
               </a:lnSpc>
               <a:buNone/>
             </a:pPr>
             <a:r>
-              <a:rPr lang="en-US" sz="1250" dirty="0">
+              <a:rPr lang="en-US" sz="1250" b="1" dirty="0">
                 <a:solidFill>
                   <a:srgbClr val="1A1D1B"/>
                 </a:solidFill>
@@ -2401,19 +2442,19 @@
                 <a:ea typeface="Microsoft JhengHei" pitchFamily="34" charset="-122"/>
                 <a:cs typeface="Microsoft JhengHei" pitchFamily="34" charset="-120"/>
               </a:rPr>
-              <a:t>沒有人教過它</a:t>
+              <a:t>沒有人教過它，</a:t>
             </a:r>
             <a:endParaRPr lang="en-US" sz="1250" dirty="0"/>
           </a:p>
           <a:p>
             <a:pPr algn="ctr" indent="0" marL="0">
               <a:lnSpc>
-                <a:spcPts val="2000"/>
+                <a:spcPts val="1800"/>
               </a:lnSpc>
               <a:buNone/>
             </a:pPr>
             <a:r>
-              <a:rPr lang="en-US" sz="1250" dirty="0">
+              <a:rPr lang="en-US" sz="1250" b="1" dirty="0">
                 <a:solidFill>
                   <a:srgbClr val="1A1D1B"/>
                 </a:solidFill>
@@ -2429,7 +2470,7 @@
       </p:sp>
       <p:sp>
         <p:nvSpPr>
-          <p:cNvPr id="10" name="Shape 7"/>
+          <p:cNvPr id="11" name="Shape 8"/>
           <p:cNvSpPr/>
           <p:nvPr/>
         </p:nvSpPr>
@@ -2456,7 +2497,7 @@
       </p:sp>
       <p:sp>
         <p:nvSpPr>
-          <p:cNvPr id="11" name="Text 8"/>
+          <p:cNvPr id="12" name="Text 9"/>
           <p:cNvSpPr/>
           <p:nvPr/>
         </p:nvSpPr>
@@ -2495,7 +2536,7 @@
       </p:sp>
       <p:sp>
         <p:nvSpPr>
-          <p:cNvPr id="12" name="Text 9"/>
+          <p:cNvPr id="13" name="Text 10"/>
           <p:cNvSpPr/>
           <p:nvPr/>
         </p:nvSpPr>
@@ -2534,7 +2575,7 @@
       </p:sp>
       <p:sp>
         <p:nvSpPr>
-          <p:cNvPr id="13" name="Text 10"/>
+          <p:cNvPr id="14" name="Text 11"/>
           <p:cNvSpPr/>
           <p:nvPr/>
         </p:nvSpPr>
